--- a/docs/minumsa-business-innovation.pptx
+++ b/docs/minumsa-business-innovation.pptx
@@ -3345,7 +3345,7 @@
               </a:defRPr>
             </a:pPr>
             <a:r>
-              <a:t>▸ 인프린트 브랜드를 통한 사업 다각화: 문학 외 아동/청소년(비룡소), 과학(사이언스북스), 장르문학(황금가지) 등 전문 인프린트 브랜드를 성공적으로 운영하여 다양한 독자층을 공략하고 밀리언셀러를 배출하며 사업 영역을 확장했습니다.</a:t>
+              <a:t>▸ 인프린트 브랜드를 통한 사업 다각화: 문학 외 아동/청소년(비룡소), 과학(사이언스북스), 장르문학(황금가지) 등 전문 인프린트 브랜드를 운영하여 다양한 독자층을 공략하고 밀리언셀러를 배출하며 사업 영역을 확장했습니다.</a:t>
             </a:r>
           </a:p>
         </p:txBody>

--- a/docs/minumsa-business-innovation.pptx
+++ b/docs/minumsa-business-innovation.pptx
@@ -6,6 +6,10 @@
   </p:sldMasterIdLst>
   <p:sldIdLst>
     <p:sldId id="256" r:id="rId7"/>
+    <p:sldId id="257" r:id="rId8"/>
+    <p:sldId id="258" r:id="rId9"/>
+    <p:sldId id="259" r:id="rId10"/>
+    <p:sldId id="260" r:id="rId11"/>
   </p:sldIdLst>
   <p:sldSz cx="12191695" cy="6858000" type="screen4x3"/>
   <p:notesSz cx="6858000" cy="9144000"/>
@@ -3084,7 +3088,7 @@
     <p:bg>
       <p:bgPr>
         <a:solidFill>
-          <a:srgbClr val="1A1A2E"/>
+          <a:srgbClr val="0F0F1A"/>
         </a:solidFill>
         <a:effectLst/>
       </p:bgPr>
@@ -3104,8 +3108,8 @@
         </p:nvSpPr>
         <p:spPr>
           <a:xfrm>
-            <a:off x="457200" y="274320"/>
-            <a:ext cx="2743200" cy="365760"/>
+            <a:off x="914400" y="1097280"/>
+            <a:ext cx="10362895" cy="457200"/>
           </a:xfrm>
           <a:prstGeom prst="rect">
             <a:avLst/>
@@ -3119,7 +3123,7 @@
           <a:lstStyle/>
           <a:p>
             <a:pPr>
-              <a:defRPr sz="1400" b="1">
+              <a:defRPr sz="1600" b="1">
                 <a:solidFill>
                   <a:srgbClr val="FF6B6B"/>
                 </a:solidFill>
@@ -3127,7 +3131,7 @@
               </a:defRPr>
             </a:pPr>
             <a:r>
-              <a:t>[ 비즈니스 ]</a:t>
+              <a:t>💡 [ 비즈니스 ]</a:t>
             </a:r>
           </a:p>
         </p:txBody>
@@ -3140,8 +3144,8 @@
         </p:nvSpPr>
         <p:spPr>
           <a:xfrm>
-            <a:off x="457200" y="640080"/>
-            <a:ext cx="11277295" cy="914400"/>
+            <a:off x="914400" y="1645920"/>
+            <a:ext cx="10362895" cy="1828800"/>
           </a:xfrm>
           <a:prstGeom prst="rect">
             <a:avLst/>
@@ -3155,7 +3159,7 @@
           <a:lstStyle/>
           <a:p>
             <a:pPr>
-              <a:defRPr sz="3200" b="1">
+              <a:defRPr sz="3600" b="1">
                 <a:solidFill>
                   <a:srgbClr val="FFFFFF"/>
                 </a:solidFill>
@@ -3176,14 +3180,14 @@
         </p:nvSpPr>
         <p:spPr>
           <a:xfrm>
-            <a:off x="457200" y="1600200"/>
-            <a:ext cx="1828800" cy="36576"/>
+            <a:off x="914400" y="3474720"/>
+            <a:ext cx="2286000" cy="36576"/>
           </a:xfrm>
           <a:prstGeom prst="rect">
             <a:avLst/>
           </a:prstGeom>
           <a:solidFill>
-            <a:srgbClr val="64B5F6"/>
+            <a:srgbClr val="667EEA"/>
           </a:solidFill>
           <a:ln>
             <a:noFill/>
@@ -3219,8 +3223,8 @@
         </p:nvSpPr>
         <p:spPr>
           <a:xfrm>
-            <a:off x="457200" y="1828800"/>
-            <a:ext cx="11277295" cy="1097280"/>
+            <a:off x="914400" y="3840480"/>
+            <a:ext cx="10362895" cy="1828800"/>
           </a:xfrm>
           <a:prstGeom prst="rect">
             <a:avLst/>
@@ -3234,9 +3238,12 @@
           <a:lstStyle/>
           <a:p>
             <a:pPr>
-              <a:defRPr sz="1600">
+              <a:lnSpc>
+                <a:spcPct val="130000"/>
+              </a:lnSpc>
+              <a:defRPr sz="1800">
                 <a:solidFill>
-                  <a:srgbClr val="CCCCCC"/>
+                  <a:srgbClr val="A0A0B8"/>
                 </a:solidFill>
                 <a:latin typeface="Malgun Gothic"/>
               </a:defRPr>
@@ -3247,16 +3254,42 @@
           </a:p>
         </p:txBody>
       </p:sp>
-      <p:sp>
-        <p:nvSpPr>
-          <p:cNvPr id="6" name="TextBox 5"/>
+    </p:spTree>
+  </p:cSld>
+  <p:clrMapOvr>
+    <a:masterClrMapping/>
+  </p:clrMapOvr>
+</p:sld>
+</file>
+
+<file path=ppt/slides/slide2.xml><?xml version="1.0" encoding="utf-8"?>
+<p:sld xmlns:a="http://schemas.openxmlformats.org/drawingml/2006/main" xmlns:p="http://schemas.openxmlformats.org/presentationml/2006/main" xmlns:r="http://schemas.openxmlformats.org/officeDocument/2006/relationships">
+  <p:cSld>
+    <p:bg>
+      <p:bgPr>
+        <a:solidFill>
+          <a:srgbClr val="0F0F1A"/>
+        </a:solidFill>
+        <a:effectLst/>
+      </p:bgPr>
+    </p:bg>
+    <p:spTree>
+      <p:nvGrpSpPr>
+        <p:cNvPr id="1" name=""/>
+        <p:cNvGrpSpPr/>
+        <p:nvPr/>
+      </p:nvGrpSpPr>
+      <p:grpSpPr/>
+      <p:sp>
+        <p:nvSpPr>
+          <p:cNvPr id="2" name="TextBox 1"/>
           <p:cNvSpPr txBox="1"/>
           <p:nvPr/>
         </p:nvSpPr>
         <p:spPr>
           <a:xfrm>
-            <a:off x="457200" y="3108960"/>
-            <a:ext cx="11277295" cy="2926080"/>
+            <a:off x="914400" y="548640"/>
+            <a:ext cx="10362895" cy="365760"/>
           </a:xfrm>
           <a:prstGeom prst="rect">
             <a:avLst/>
@@ -3264,102 +3297,35 @@
           <a:noFill/>
         </p:spPr>
         <p:txBody>
-          <a:bodyPr wrap="square">
+          <a:bodyPr wrap="none">
             <a:spAutoFit/>
           </a:bodyPr>
           <a:lstStyle/>
           <a:p>
             <a:pPr>
-              <a:spcAft>
-                <a:spcPts val="800"/>
-              </a:spcAft>
-              <a:defRPr sz="1300">
+              <a:defRPr sz="1200" b="1">
                 <a:solidFill>
-                  <a:srgbClr val="EEEEEE"/>
+                  <a:srgbClr val="667EEA"/>
                 </a:solidFill>
                 <a:latin typeface="Malgun Gothic"/>
               </a:defRPr>
             </a:pPr>
             <a:r>
-              <a:t>▸ 유튜브 '민음사TV'를 통한 팬덤 구축 및 마케팅 혁신: 책 홍보 대신 직원 브랜딩과 소통에 집중하여 강력한 팬덤을 형성하고, 유료 멤버십 '민음블록' 성공과 함께 매출 증대로 이어지는 새로운 마케팅 및 판매 모델을 구축했습니다.</a:t>
-            </a:r>
-          </a:p>
-          <a:p>
-            <a:pPr>
-              <a:spcAft>
-                <a:spcPts val="800"/>
-              </a:spcAft>
-              <a:defRPr sz="1300">
-                <a:solidFill>
-                  <a:srgbClr val="EEEEEE"/>
-                </a:solidFill>
-                <a:latin typeface="Malgun Gothic"/>
-              </a:defRPr>
-            </a:pPr>
-            <a:r>
-              <a:t>▸ 백리스트(구간 도서) 중심의 수익 구조 강화: 신간 위주가 아닌 제작비 회수가 완료된 구간 도서, 특히 '세계 문학 전집'과 같은 스테디셀러 IP 판매를 극대화하여 출판업계 평균을 훨씬 뛰어넘는 높은 영업이익률을 달성했습니다.</a:t>
-            </a:r>
-          </a:p>
-          <a:p>
-            <a:pPr>
-              <a:spcAft>
-                <a:spcPts val="800"/>
-              </a:spcAft>
-              <a:defRPr sz="1300">
-                <a:solidFill>
-                  <a:srgbClr val="EEEEEE"/>
-                </a:solidFill>
-                <a:latin typeface="Malgun Gothic"/>
-              </a:defRPr>
-            </a:pPr>
-            <a:r>
-              <a:t>▸ 60년간 축적된 출판 혁신 DNA와 선제적 저작권 확보: 가로쓰기 도입, 북 디자인 개념 정립 등 책 자체의 혁신과 더불어, 저작권 협약 가입 10년 전부터 해외 저작권을 선제적으로 확보하여 '세계 문학 전집'이라는 강력한 IP를 구축한 장기적인 비즈니스 전략을 실행했습니다.</a:t>
-            </a:r>
-          </a:p>
-          <a:p>
-            <a:pPr>
-              <a:spcAft>
-                <a:spcPts val="800"/>
-              </a:spcAft>
-              <a:defRPr sz="1300">
-                <a:solidFill>
-                  <a:srgbClr val="EEEEEE"/>
-                </a:solidFill>
-                <a:latin typeface="Malgun Gothic"/>
-              </a:defRPr>
-            </a:pPr>
-            <a:r>
-              <a:t>▸ 인재의 자율성을 존중하는 기업 문화: '한번 해 보게' 정신으로 편집자들에게 책 기획 및 제작의 자율성을 부여하고 전문성을 신뢰하는 문화가 혁신적인 시도와 성공적인 콘텐츠 제작의 기반이 되었습니다.</a:t>
-            </a:r>
-          </a:p>
-          <a:p>
-            <a:pPr>
-              <a:spcAft>
-                <a:spcPts val="800"/>
-              </a:spcAft>
-              <a:defRPr sz="1300">
-                <a:solidFill>
-                  <a:srgbClr val="EEEEEE"/>
-                </a:solidFill>
-                <a:latin typeface="Malgun Gothic"/>
-              </a:defRPr>
-            </a:pPr>
-            <a:r>
-              <a:t>▸ 인프린트 브랜드를 통한 사업 다각화: 문학 외 아동/청소년(비룡소), 과학(사이언스북스), 장르문학(황금가지) 등 전문 인프린트 브랜드를 운영하여 다양한 독자층을 공략하고 밀리언셀러를 배출하며 사업 영역을 확장했습니다.</a:t>
-            </a:r>
-          </a:p>
-        </p:txBody>
-      </p:sp>
-      <p:sp>
-        <p:nvSpPr>
-          <p:cNvPr id="7" name="TextBox 6"/>
+              <a:t>CORE INSIGHT 01 / 03</a:t>
+            </a:r>
+          </a:p>
+        </p:txBody>
+      </p:sp>
+      <p:sp>
+        <p:nvSpPr>
+          <p:cNvPr id="3" name="TextBox 2"/>
           <p:cNvSpPr txBox="1"/>
           <p:nvPr/>
         </p:nvSpPr>
         <p:spPr>
           <a:xfrm>
-            <a:off x="457200" y="6217920"/>
-            <a:ext cx="11277295" cy="457200"/>
+            <a:off x="914400" y="1097280"/>
+            <a:ext cx="10362895" cy="1097280"/>
           </a:xfrm>
           <a:prstGeom prst="rect">
             <a:avLst/>
@@ -3367,13 +3333,620 @@
           <a:noFill/>
         </p:spPr>
         <p:txBody>
+          <a:bodyPr wrap="square">
+            <a:spAutoFit/>
+          </a:bodyPr>
+          <a:lstStyle/>
+          <a:p>
+            <a:pPr>
+              <a:defRPr sz="3000" b="1">
+                <a:solidFill>
+                  <a:srgbClr val="FFFFFF"/>
+                </a:solidFill>
+                <a:latin typeface="Malgun Gothic"/>
+              </a:defRPr>
+            </a:pPr>
+            <a:r>
+              <a:t>유튜브 채널 혁신</a:t>
+            </a:r>
+          </a:p>
+        </p:txBody>
+      </p:sp>
+      <p:sp>
+        <p:nvSpPr>
+          <p:cNvPr id="4" name="Rectangle 3"/>
+          <p:cNvSpPr/>
+          <p:nvPr/>
+        </p:nvSpPr>
+        <p:spPr>
+          <a:xfrm>
+            <a:off x="914400" y="2286000"/>
+            <a:ext cx="10362895" cy="18288"/>
+          </a:xfrm>
+          <a:prstGeom prst="rect">
+            <a:avLst/>
+          </a:prstGeom>
+          <a:solidFill>
+            <a:srgbClr val="2D2D44"/>
+          </a:solidFill>
+          <a:ln>
+            <a:noFill/>
+          </a:ln>
+        </p:spPr>
+        <p:style>
+          <a:lnRef idx="1">
+            <a:schemeClr val="accent1"/>
+          </a:lnRef>
+          <a:fillRef idx="3">
+            <a:schemeClr val="accent1"/>
+          </a:fillRef>
+          <a:effectRef idx="2">
+            <a:schemeClr val="accent1"/>
+          </a:effectRef>
+          <a:fontRef idx="minor">
+            <a:schemeClr val="lt1"/>
+          </a:fontRef>
+        </p:style>
+        <p:txBody>
+          <a:bodyPr rtlCol="0" anchor="ctr"/>
+          <a:lstStyle/>
+          <a:p>
+            <a:pPr algn="ctr"/>
+          </a:p>
+        </p:txBody>
+      </p:sp>
+      <p:sp>
+        <p:nvSpPr>
+          <p:cNvPr id="5" name="TextBox 4"/>
+          <p:cNvSpPr txBox="1"/>
+          <p:nvPr/>
+        </p:nvSpPr>
+        <p:spPr>
+          <a:xfrm>
+            <a:off x="914400" y="2743200"/>
+            <a:ext cx="10362895" cy="3200400"/>
+          </a:xfrm>
+          <a:prstGeom prst="rect">
+            <a:avLst/>
+          </a:prstGeom>
+          <a:noFill/>
+        </p:spPr>
+        <p:txBody>
+          <a:bodyPr wrap="square">
+            <a:spAutoFit/>
+          </a:bodyPr>
+          <a:lstStyle/>
+          <a:p>
+            <a:pPr>
+              <a:lnSpc>
+                <a:spcPct val="140000"/>
+              </a:lnSpc>
+              <a:defRPr sz="2000">
+                <a:solidFill>
+                  <a:srgbClr val="E8E8F0"/>
+                </a:solidFill>
+                <a:latin typeface="Malgun Gothic"/>
+              </a:defRPr>
+            </a:pPr>
+            <a:r>
+              <a:t>책을 노골적으로 홍보하는 대신 내부 직원들의 솔직한 브랜딩과 소통에 집중하여 강력한 유료 팬덤을 성공적으로 형성했습니다.</a:t>
+            </a:r>
+          </a:p>
+        </p:txBody>
+      </p:sp>
+    </p:spTree>
+  </p:cSld>
+  <p:clrMapOvr>
+    <a:masterClrMapping/>
+  </p:clrMapOvr>
+</p:sld>
+</file>
+
+<file path=ppt/slides/slide3.xml><?xml version="1.0" encoding="utf-8"?>
+<p:sld xmlns:a="http://schemas.openxmlformats.org/drawingml/2006/main" xmlns:p="http://schemas.openxmlformats.org/presentationml/2006/main" xmlns:r="http://schemas.openxmlformats.org/officeDocument/2006/relationships">
+  <p:cSld>
+    <p:bg>
+      <p:bgPr>
+        <a:solidFill>
+          <a:srgbClr val="0F0F1A"/>
+        </a:solidFill>
+        <a:effectLst/>
+      </p:bgPr>
+    </p:bg>
+    <p:spTree>
+      <p:nvGrpSpPr>
+        <p:cNvPr id="1" name=""/>
+        <p:cNvGrpSpPr/>
+        <p:nvPr/>
+      </p:nvGrpSpPr>
+      <p:grpSpPr/>
+      <p:sp>
+        <p:nvSpPr>
+          <p:cNvPr id="2" name="TextBox 1"/>
+          <p:cNvSpPr txBox="1"/>
+          <p:nvPr/>
+        </p:nvSpPr>
+        <p:spPr>
+          <a:xfrm>
+            <a:off x="914400" y="548640"/>
+            <a:ext cx="10362895" cy="365760"/>
+          </a:xfrm>
+          <a:prstGeom prst="rect">
+            <a:avLst/>
+          </a:prstGeom>
+          <a:noFill/>
+        </p:spPr>
+        <p:txBody>
           <a:bodyPr wrap="none">
             <a:spAutoFit/>
           </a:bodyPr>
           <a:lstStyle/>
           <a:p>
             <a:pPr>
-              <a:defRPr sz="1000">
+              <a:defRPr sz="1200" b="1">
+                <a:solidFill>
+                  <a:srgbClr val="667EEA"/>
+                </a:solidFill>
+                <a:latin typeface="Malgun Gothic"/>
+              </a:defRPr>
+            </a:pPr>
+            <a:r>
+              <a:t>CORE INSIGHT 02 / 03</a:t>
+            </a:r>
+          </a:p>
+        </p:txBody>
+      </p:sp>
+      <p:sp>
+        <p:nvSpPr>
+          <p:cNvPr id="3" name="TextBox 2"/>
+          <p:cNvSpPr txBox="1"/>
+          <p:nvPr/>
+        </p:nvSpPr>
+        <p:spPr>
+          <a:xfrm>
+            <a:off x="914400" y="1097280"/>
+            <a:ext cx="10362895" cy="1097280"/>
+          </a:xfrm>
+          <a:prstGeom prst="rect">
+            <a:avLst/>
+          </a:prstGeom>
+          <a:noFill/>
+        </p:spPr>
+        <p:txBody>
+          <a:bodyPr wrap="square">
+            <a:spAutoFit/>
+          </a:bodyPr>
+          <a:lstStyle/>
+          <a:p>
+            <a:pPr>
+              <a:defRPr sz="3000" b="1">
+                <a:solidFill>
+                  <a:srgbClr val="FFFFFF"/>
+                </a:solidFill>
+                <a:latin typeface="Malgun Gothic"/>
+              </a:defRPr>
+            </a:pPr>
+            <a:r>
+              <a:t>백리스트 수익 극대화</a:t>
+            </a:r>
+          </a:p>
+        </p:txBody>
+      </p:sp>
+      <p:sp>
+        <p:nvSpPr>
+          <p:cNvPr id="4" name="Rectangle 3"/>
+          <p:cNvSpPr/>
+          <p:nvPr/>
+        </p:nvSpPr>
+        <p:spPr>
+          <a:xfrm>
+            <a:off x="914400" y="2286000"/>
+            <a:ext cx="10362895" cy="18288"/>
+          </a:xfrm>
+          <a:prstGeom prst="rect">
+            <a:avLst/>
+          </a:prstGeom>
+          <a:solidFill>
+            <a:srgbClr val="2D2D44"/>
+          </a:solidFill>
+          <a:ln>
+            <a:noFill/>
+          </a:ln>
+        </p:spPr>
+        <p:style>
+          <a:lnRef idx="1">
+            <a:schemeClr val="accent1"/>
+          </a:lnRef>
+          <a:fillRef idx="3">
+            <a:schemeClr val="accent1"/>
+          </a:fillRef>
+          <a:effectRef idx="2">
+            <a:schemeClr val="accent1"/>
+          </a:effectRef>
+          <a:fontRef idx="minor">
+            <a:schemeClr val="lt1"/>
+          </a:fontRef>
+        </p:style>
+        <p:txBody>
+          <a:bodyPr rtlCol="0" anchor="ctr"/>
+          <a:lstStyle/>
+          <a:p>
+            <a:pPr algn="ctr"/>
+          </a:p>
+        </p:txBody>
+      </p:sp>
+      <p:sp>
+        <p:nvSpPr>
+          <p:cNvPr id="5" name="TextBox 4"/>
+          <p:cNvSpPr txBox="1"/>
+          <p:nvPr/>
+        </p:nvSpPr>
+        <p:spPr>
+          <a:xfrm>
+            <a:off x="914400" y="2743200"/>
+            <a:ext cx="10362895" cy="3200400"/>
+          </a:xfrm>
+          <a:prstGeom prst="rect">
+            <a:avLst/>
+          </a:prstGeom>
+          <a:noFill/>
+        </p:spPr>
+        <p:txBody>
+          <a:bodyPr wrap="square">
+            <a:spAutoFit/>
+          </a:bodyPr>
+          <a:lstStyle/>
+          <a:p>
+            <a:pPr>
+              <a:lnSpc>
+                <a:spcPct val="140000"/>
+              </a:lnSpc>
+              <a:defRPr sz="2000">
+                <a:solidFill>
+                  <a:srgbClr val="E8E8F0"/>
+                </a:solidFill>
+                <a:latin typeface="Malgun Gothic"/>
+              </a:defRPr>
+            </a:pPr>
+            <a:r>
+              <a:t>신간 제작비 리스크를 피하고 이미 제작비가 회수된 구간 도서와 세계 문학 전집 IP 판매를 결합하여 압도적인 영업이익률을 확보했습니다.</a:t>
+            </a:r>
+          </a:p>
+        </p:txBody>
+      </p:sp>
+    </p:spTree>
+  </p:cSld>
+  <p:clrMapOvr>
+    <a:masterClrMapping/>
+  </p:clrMapOvr>
+</p:sld>
+</file>
+
+<file path=ppt/slides/slide4.xml><?xml version="1.0" encoding="utf-8"?>
+<p:sld xmlns:a="http://schemas.openxmlformats.org/drawingml/2006/main" xmlns:p="http://schemas.openxmlformats.org/presentationml/2006/main" xmlns:r="http://schemas.openxmlformats.org/officeDocument/2006/relationships">
+  <p:cSld>
+    <p:bg>
+      <p:bgPr>
+        <a:solidFill>
+          <a:srgbClr val="0F0F1A"/>
+        </a:solidFill>
+        <a:effectLst/>
+      </p:bgPr>
+    </p:bg>
+    <p:spTree>
+      <p:nvGrpSpPr>
+        <p:cNvPr id="1" name=""/>
+        <p:cNvGrpSpPr/>
+        <p:nvPr/>
+      </p:nvGrpSpPr>
+      <p:grpSpPr/>
+      <p:sp>
+        <p:nvSpPr>
+          <p:cNvPr id="2" name="TextBox 1"/>
+          <p:cNvSpPr txBox="1"/>
+          <p:nvPr/>
+        </p:nvSpPr>
+        <p:spPr>
+          <a:xfrm>
+            <a:off x="914400" y="548640"/>
+            <a:ext cx="10362895" cy="365760"/>
+          </a:xfrm>
+          <a:prstGeom prst="rect">
+            <a:avLst/>
+          </a:prstGeom>
+          <a:noFill/>
+        </p:spPr>
+        <p:txBody>
+          <a:bodyPr wrap="none">
+            <a:spAutoFit/>
+          </a:bodyPr>
+          <a:lstStyle/>
+          <a:p>
+            <a:pPr>
+              <a:defRPr sz="1200" b="1">
+                <a:solidFill>
+                  <a:srgbClr val="667EEA"/>
+                </a:solidFill>
+                <a:latin typeface="Malgun Gothic"/>
+              </a:defRPr>
+            </a:pPr>
+            <a:r>
+              <a:t>CORE INSIGHT 03 / 03</a:t>
+            </a:r>
+          </a:p>
+        </p:txBody>
+      </p:sp>
+      <p:sp>
+        <p:nvSpPr>
+          <p:cNvPr id="3" name="TextBox 2"/>
+          <p:cNvSpPr txBox="1"/>
+          <p:nvPr/>
+        </p:nvSpPr>
+        <p:spPr>
+          <a:xfrm>
+            <a:off x="914400" y="1097280"/>
+            <a:ext cx="10362895" cy="1097280"/>
+          </a:xfrm>
+          <a:prstGeom prst="rect">
+            <a:avLst/>
+          </a:prstGeom>
+          <a:noFill/>
+        </p:spPr>
+        <p:txBody>
+          <a:bodyPr wrap="square">
+            <a:spAutoFit/>
+          </a:bodyPr>
+          <a:lstStyle/>
+          <a:p>
+            <a:pPr>
+              <a:defRPr sz="3000" b="1">
+                <a:solidFill>
+                  <a:srgbClr val="FFFFFF"/>
+                </a:solidFill>
+                <a:latin typeface="Malgun Gothic"/>
+              </a:defRPr>
+            </a:pPr>
+            <a:r>
+              <a:t>자율적 기획 문화</a:t>
+            </a:r>
+          </a:p>
+        </p:txBody>
+      </p:sp>
+      <p:sp>
+        <p:nvSpPr>
+          <p:cNvPr id="4" name="Rectangle 3"/>
+          <p:cNvSpPr/>
+          <p:nvPr/>
+        </p:nvSpPr>
+        <p:spPr>
+          <a:xfrm>
+            <a:off x="914400" y="2286000"/>
+            <a:ext cx="10362895" cy="18288"/>
+          </a:xfrm>
+          <a:prstGeom prst="rect">
+            <a:avLst/>
+          </a:prstGeom>
+          <a:solidFill>
+            <a:srgbClr val="2D2D44"/>
+          </a:solidFill>
+          <a:ln>
+            <a:noFill/>
+          </a:ln>
+        </p:spPr>
+        <p:style>
+          <a:lnRef idx="1">
+            <a:schemeClr val="accent1"/>
+          </a:lnRef>
+          <a:fillRef idx="3">
+            <a:schemeClr val="accent1"/>
+          </a:fillRef>
+          <a:effectRef idx="2">
+            <a:schemeClr val="accent1"/>
+          </a:effectRef>
+          <a:fontRef idx="minor">
+            <a:schemeClr val="lt1"/>
+          </a:fontRef>
+        </p:style>
+        <p:txBody>
+          <a:bodyPr rtlCol="0" anchor="ctr"/>
+          <a:lstStyle/>
+          <a:p>
+            <a:pPr algn="ctr"/>
+          </a:p>
+        </p:txBody>
+      </p:sp>
+      <p:sp>
+        <p:nvSpPr>
+          <p:cNvPr id="5" name="TextBox 4"/>
+          <p:cNvSpPr txBox="1"/>
+          <p:nvPr/>
+        </p:nvSpPr>
+        <p:spPr>
+          <a:xfrm>
+            <a:off x="914400" y="2743200"/>
+            <a:ext cx="10362895" cy="3200400"/>
+          </a:xfrm>
+          <a:prstGeom prst="rect">
+            <a:avLst/>
+          </a:prstGeom>
+          <a:noFill/>
+        </p:spPr>
+        <p:txBody>
+          <a:bodyPr wrap="square">
+            <a:spAutoFit/>
+          </a:bodyPr>
+          <a:lstStyle/>
+          <a:p>
+            <a:pPr>
+              <a:lnSpc>
+                <a:spcPct val="140000"/>
+              </a:lnSpc>
+              <a:defRPr sz="2000">
+                <a:solidFill>
+                  <a:srgbClr val="E8E8F0"/>
+                </a:solidFill>
+                <a:latin typeface="Malgun Gothic"/>
+              </a:defRPr>
+            </a:pPr>
+            <a:r>
+              <a:t>책 기획과 제작 전반에 대한 편집자들의 의사결정 권한을 전적으로 신뢰하고 보장하는 '한번 해보게' 문화가 혁신의 뿌리가 되었습니다.</a:t>
+            </a:r>
+          </a:p>
+        </p:txBody>
+      </p:sp>
+    </p:spTree>
+  </p:cSld>
+  <p:clrMapOvr>
+    <a:masterClrMapping/>
+  </p:clrMapOvr>
+</p:sld>
+</file>
+
+<file path=ppt/slides/slide5.xml><?xml version="1.0" encoding="utf-8"?>
+<p:sld xmlns:a="http://schemas.openxmlformats.org/drawingml/2006/main" xmlns:p="http://schemas.openxmlformats.org/presentationml/2006/main" xmlns:r="http://schemas.openxmlformats.org/officeDocument/2006/relationships">
+  <p:cSld>
+    <p:bg>
+      <p:bgPr>
+        <a:solidFill>
+          <a:srgbClr val="0F0F1A"/>
+        </a:solidFill>
+        <a:effectLst/>
+      </p:bgPr>
+    </p:bg>
+    <p:spTree>
+      <p:nvGrpSpPr>
+        <p:cNvPr id="1" name=""/>
+        <p:cNvGrpSpPr/>
+        <p:nvPr/>
+      </p:nvGrpSpPr>
+      <p:grpSpPr/>
+      <p:sp>
+        <p:nvSpPr>
+          <p:cNvPr id="2" name="Rounded Rectangle 1"/>
+          <p:cNvSpPr/>
+          <p:nvPr/>
+        </p:nvSpPr>
+        <p:spPr>
+          <a:xfrm>
+            <a:off x="914400" y="1371600"/>
+            <a:ext cx="10362895" cy="3474720"/>
+          </a:xfrm>
+          <a:prstGeom prst="roundRect">
+            <a:avLst/>
+          </a:prstGeom>
+          <a:solidFill>
+            <a:srgbClr val="1A1A2E"/>
+          </a:solidFill>
+          <a:ln>
+            <a:solidFill>
+              <a:srgbClr val="2D2D44"/>
+            </a:solidFill>
+          </a:ln>
+        </p:spPr>
+        <p:style>
+          <a:lnRef idx="1">
+            <a:schemeClr val="accent1"/>
+          </a:lnRef>
+          <a:fillRef idx="3">
+            <a:schemeClr val="accent1"/>
+          </a:fillRef>
+          <a:effectRef idx="2">
+            <a:schemeClr val="accent1"/>
+          </a:effectRef>
+          <a:fontRef idx="minor">
+            <a:schemeClr val="lt1"/>
+          </a:fontRef>
+        </p:style>
+        <p:txBody>
+          <a:bodyPr rtlCol="0" anchor="ctr"/>
+          <a:lstStyle/>
+          <a:p>
+            <a:pPr algn="ctr"/>
+          </a:p>
+        </p:txBody>
+      </p:sp>
+      <p:sp>
+        <p:nvSpPr>
+          <p:cNvPr id="3" name="TextBox 2"/>
+          <p:cNvSpPr txBox="1"/>
+          <p:nvPr/>
+        </p:nvSpPr>
+        <p:spPr>
+          <a:xfrm>
+            <a:off x="1371600" y="1645920"/>
+            <a:ext cx="9448495" cy="2926080"/>
+          </a:xfrm>
+          <a:prstGeom prst="rect">
+            <a:avLst/>
+          </a:prstGeom>
+          <a:noFill/>
+        </p:spPr>
+        <p:txBody>
+          <a:bodyPr wrap="square">
+            <a:spAutoFit/>
+          </a:bodyPr>
+          <a:lstStyle/>
+          <a:p>
+            <a:pPr>
+              <a:spcAft>
+                <a:spcPts val="1400"/>
+              </a:spcAft>
+              <a:defRPr sz="1400" b="1">
+                <a:solidFill>
+                  <a:srgbClr val="FF6B6B"/>
+                </a:solidFill>
+                <a:latin typeface="Malgun Gothic"/>
+              </a:defRPr>
+            </a:pPr>
+            <a:r>
+              <a:t>🎯 AI 추천사 및 시청 가치</a:t>
+            </a:r>
+          </a:p>
+          <a:p>
+            <a:pPr>
+              <a:lnSpc>
+                <a:spcPct val="130000"/>
+              </a:lnSpc>
+              <a:defRPr sz="1800" i="1">
+                <a:solidFill>
+                  <a:srgbClr val="E8E8F0"/>
+                </a:solidFill>
+                <a:latin typeface="Malgun Gothic"/>
+              </a:defRPr>
+            </a:pPr>
+            <a:r>
+              <a:t>출판 업계의 패러다임을 바꾼 민음사의 영리한 유튜브 소통법과 장기적인 IP 비즈니스 구조를 배울 수 있습니다. 전통 산업군에서 새로운 마케팅 돌파구를 모색하는 모든 비즈니스 리더와 기획자에게 시청을 강력히 권장합니다.</a:t>
+            </a:r>
+          </a:p>
+        </p:txBody>
+      </p:sp>
+      <p:sp>
+        <p:nvSpPr>
+          <p:cNvPr id="4" name="TextBox 3"/>
+          <p:cNvSpPr txBox="1"/>
+          <p:nvPr/>
+        </p:nvSpPr>
+        <p:spPr>
+          <a:xfrm>
+            <a:off x="914400" y="5303520"/>
+            <a:ext cx="10362895" cy="914400"/>
+          </a:xfrm>
+          <a:prstGeom prst="rect">
+            <a:avLst/>
+          </a:prstGeom>
+          <a:noFill/>
+        </p:spPr>
+        <p:txBody>
+          <a:bodyPr wrap="square">
+            <a:spAutoFit/>
+          </a:bodyPr>
+          <a:lstStyle/>
+          <a:p>
+            <a:pPr>
+              <a:lnSpc>
+                <a:spcPct val="130000"/>
+              </a:lnSpc>
+              <a:defRPr sz="1200">
                 <a:solidFill>
                   <a:srgbClr val="888888"/>
                 </a:solidFill>
@@ -3381,7 +3954,11 @@
               </a:defRPr>
             </a:pPr>
             <a:r>
-              <a:t>Keywords: 민음사, 출판, 비즈니스 모델, 유튜브 마케팅, 백리스트  |  🔗 https://youtu.be/LKKTAJytBRo</a:t>
+              <a:t>🏷️ Keywords: 민음사, 출판, 비즈니스 모델, 유튜브 마케팅, 백리스트</a:t>
+            </a:r>
+            <a:br/>
+            <a:r>
+              <a:t>🔗 Source: https://youtu.be/LKKTAJytBRo</a:t>
             </a:r>
           </a:p>
         </p:txBody>

--- a/docs/minumsa-business-innovation.pptx
+++ b/docs/minumsa-business-innovation.pptx
@@ -3108,7 +3108,7 @@
         </p:nvSpPr>
         <p:spPr>
           <a:xfrm>
-            <a:off x="914400" y="1097280"/>
+            <a:off x="914400" y="914400"/>
             <a:ext cx="10362895" cy="457200"/>
           </a:xfrm>
           <a:prstGeom prst="rect">
@@ -3123,7 +3123,7 @@
           <a:lstStyle/>
           <a:p>
             <a:pPr>
-              <a:defRPr sz="1600" b="1">
+              <a:defRPr sz="2200" b="1">
                 <a:solidFill>
                   <a:srgbClr val="FF6B6B"/>
                 </a:solidFill>
@@ -3144,7 +3144,7 @@
         </p:nvSpPr>
         <p:spPr>
           <a:xfrm>
-            <a:off x="914400" y="1645920"/>
+            <a:off x="914400" y="1463040"/>
             <a:ext cx="10362895" cy="1828800"/>
           </a:xfrm>
           <a:prstGeom prst="rect">
@@ -3159,7 +3159,7 @@
           <a:lstStyle/>
           <a:p>
             <a:pPr>
-              <a:defRPr sz="3600" b="1">
+              <a:defRPr sz="4600" b="1">
                 <a:solidFill>
                   <a:srgbClr val="FFFFFF"/>
                 </a:solidFill>
@@ -3180,8 +3180,8 @@
         </p:nvSpPr>
         <p:spPr>
           <a:xfrm>
-            <a:off x="914400" y="3474720"/>
-            <a:ext cx="2286000" cy="36576"/>
+            <a:off x="914400" y="3657600"/>
+            <a:ext cx="2286000" cy="54864"/>
           </a:xfrm>
           <a:prstGeom prst="rect">
             <a:avLst/>
@@ -3223,7 +3223,7 @@
         </p:nvSpPr>
         <p:spPr>
           <a:xfrm>
-            <a:off x="914400" y="3840480"/>
+            <a:off x="914400" y="4023360"/>
             <a:ext cx="10362895" cy="1828800"/>
           </a:xfrm>
           <a:prstGeom prst="rect">
@@ -3241,7 +3241,7 @@
               <a:lnSpc>
                 <a:spcPct val="130000"/>
               </a:lnSpc>
-              <a:defRPr sz="1800">
+              <a:defRPr sz="2400">
                 <a:solidFill>
                   <a:srgbClr val="A0A0B8"/>
                 </a:solidFill>
